--- a/dist/slides/u2-w05-l01.pptx
+++ b/dist/slides/u2-w05-l01.pptx
@@ -469,7 +469,7 @@
           </a:p>
           <a:p xmlns:a="http://schemas.openxmlformats.org/drawingml/2006/main">
             <a:r>
-              <a:t>Use the separate database-project.sqlite edition of the equipment desk. ReplacementCost contains fictional whole-dollar teaching estimates, not current prices. Activities are ungraded. This week practises joins and summaries; controlled changes follow in Week 6. Teaching source: https://edugenio.github.io/cs-atar-textbook/#database-solution.</a:t>
+              <a:t>Use the separate database-project.sqlite edition of the equipment desk. ReplacementCost contains fictional whole-dollar teaching estimates, not current prices. Activities are ungraded. This week practices joins and summaries; controlled changes follow in Week 6. Teaching source: https://edugenio.github.io/cs-atar-textbook/#database-solution.</a:t>
             </a:r>
           </a:p>
         </p:txBody>
